--- a/Docs/Product/presentacion ejecutiva.pptx
+++ b/Docs/Product/presentacion ejecutiva.pptx
@@ -139,7 +139,7 @@
       </p:grpSpPr>
       <p:sp>
         <p:nvSpPr>
-          <p:cNvPr id="2064519193" name="Marcador de encabezado 1"/>
+          <p:cNvPr id="640054273" name="Marcador de encabezado 1"/>
           <p:cNvSpPr>
             <a:spLocks noGrp="1"/>
           </p:cNvSpPr>
@@ -173,7 +173,7 @@
       </p:sp>
       <p:sp>
         <p:nvSpPr>
-          <p:cNvPr id="1849670720" name="Marcador de fecha 2"/>
+          <p:cNvPr id="2088794561" name="Marcador de fecha 2"/>
           <p:cNvSpPr>
             <a:spLocks noGrp="1"/>
           </p:cNvSpPr>
@@ -211,7 +211,7 @@
       </p:sp>
       <p:sp>
         <p:nvSpPr>
-          <p:cNvPr id="1807267231" name="Marcador de imagen de diapositiva 3"/>
+          <p:cNvPr id="2127919738" name="Marcador de imagen de diapositiva 3"/>
           <p:cNvSpPr>
             <a:spLocks noChangeAspect="1" noGrp="1" noRot="1"/>
           </p:cNvSpPr>
@@ -247,7 +247,7 @@
       </p:sp>
       <p:sp>
         <p:nvSpPr>
-          <p:cNvPr id="1360484886" name="Marcador de notas 4"/>
+          <p:cNvPr id="1193943275" name="Marcador de notas 4"/>
           <p:cNvSpPr>
             <a:spLocks noGrp="1"/>
           </p:cNvSpPr>
@@ -321,7 +321,7 @@
       </p:sp>
       <p:sp>
         <p:nvSpPr>
-          <p:cNvPr id="277159031" name="Marcador de pie de página 5"/>
+          <p:cNvPr id="1187237306" name="Marcador de pie de página 5"/>
           <p:cNvSpPr>
             <a:spLocks noGrp="1"/>
           </p:cNvSpPr>
@@ -355,7 +355,7 @@
       </p:sp>
       <p:sp>
         <p:nvSpPr>
-          <p:cNvPr id="1970681333" name="Marcador de número de diapositiva 6"/>
+          <p:cNvPr id="943081950" name="Marcador de número de diapositiva 6"/>
           <p:cNvSpPr>
             <a:spLocks noGrp="1"/>
           </p:cNvSpPr>
@@ -508,7 +508,7 @@
       </p:grpSpPr>
       <p:sp>
         <p:nvSpPr>
-          <p:cNvPr id="1269641955" name="Marcador de imagen de diapositiva 1"/>
+          <p:cNvPr id="2026669915" name="Marcador de imagen de diapositiva 1"/>
           <p:cNvSpPr>
             <a:spLocks noChangeAspect="1" noGrp="1" noRot="1"/>
           </p:cNvSpPr>
@@ -525,7 +525,7 @@
       </p:sp>
       <p:sp>
         <p:nvSpPr>
-          <p:cNvPr id="1154259450" name="Marcador de notas 4"/>
+          <p:cNvPr id="1880775382" name="Marcador de notas 4"/>
           <p:cNvSpPr>
             <a:spLocks noGrp="1"/>
           </p:cNvSpPr>
@@ -550,7 +550,7 @@
       </p:sp>
       <p:sp>
         <p:nvSpPr>
-          <p:cNvPr id="755610592" name="Marcador de número de diapositiva 3"/>
+          <p:cNvPr id="685243914" name="Marcador de número de diapositiva 3"/>
           <p:cNvSpPr>
             <a:spLocks noGrp="1"/>
           </p:cNvSpPr>
@@ -601,7 +601,7 @@
       </p:grpSpPr>
       <p:sp>
         <p:nvSpPr>
-          <p:cNvPr id="753572929" name="Slide Image Placeholder 1"/>
+          <p:cNvPr id="1804527673" name="Slide Image Placeholder 1"/>
           <p:cNvSpPr>
             <a:spLocks noChangeAspect="1" noGrp="1" noRot="1"/>
           </p:cNvSpPr>
@@ -613,7 +613,7 @@
       </p:sp>
       <p:sp>
         <p:nvSpPr>
-          <p:cNvPr id="1157859677" name="Notes Placeholder 2"/>
+          <p:cNvPr id="2112605387" name="Notes Placeholder 2"/>
           <p:cNvSpPr>
             <a:spLocks noGrp="1"/>
           </p:cNvSpPr>
@@ -635,7 +635,7 @@
       </p:sp>
       <p:sp>
         <p:nvSpPr>
-          <p:cNvPr id="1852181209" name="Slide Number Placeholder 3"/>
+          <p:cNvPr id="1713578117" name="Slide Number Placeholder 3"/>
           <p:cNvSpPr>
             <a:spLocks noGrp="1"/>
           </p:cNvSpPr>
@@ -686,7 +686,7 @@
       </p:grpSpPr>
       <p:sp>
         <p:nvSpPr>
-          <p:cNvPr id="1463307028" name="Slide Image Placeholder 1"/>
+          <p:cNvPr id="1957461219" name="Slide Image Placeholder 1"/>
           <p:cNvSpPr>
             <a:spLocks noChangeAspect="1" noGrp="1" noRot="1"/>
           </p:cNvSpPr>
@@ -698,7 +698,7 @@
       </p:sp>
       <p:sp>
         <p:nvSpPr>
-          <p:cNvPr id="1195942543" name="Notes Placeholder 2"/>
+          <p:cNvPr id="511004639" name="Notes Placeholder 2"/>
           <p:cNvSpPr>
             <a:spLocks noGrp="1"/>
           </p:cNvSpPr>
@@ -720,7 +720,7 @@
       </p:sp>
       <p:sp>
         <p:nvSpPr>
-          <p:cNvPr id="2054659602" name="Slide Number Placeholder 3"/>
+          <p:cNvPr id="1204475771" name="Slide Number Placeholder 3"/>
           <p:cNvSpPr>
             <a:spLocks noGrp="1"/>
           </p:cNvSpPr>
@@ -771,7 +771,7 @@
       </p:grpSpPr>
       <p:sp>
         <p:nvSpPr>
-          <p:cNvPr id="1739678222" name="Slide Image Placeholder 1"/>
+          <p:cNvPr id="465240298" name="Slide Image Placeholder 1"/>
           <p:cNvSpPr>
             <a:spLocks noChangeAspect="1" noGrp="1" noRot="1"/>
           </p:cNvSpPr>
@@ -783,7 +783,7 @@
       </p:sp>
       <p:sp>
         <p:nvSpPr>
-          <p:cNvPr id="588098184" name="Notes Placeholder 2"/>
+          <p:cNvPr id="98900960" name="Notes Placeholder 2"/>
           <p:cNvSpPr>
             <a:spLocks noGrp="1"/>
           </p:cNvSpPr>
@@ -805,7 +805,7 @@
       </p:sp>
       <p:sp>
         <p:nvSpPr>
-          <p:cNvPr id="1424426569" name="Slide Number Placeholder 3"/>
+          <p:cNvPr id="1447613400" name="Slide Number Placeholder 3"/>
           <p:cNvSpPr>
             <a:spLocks noGrp="1"/>
           </p:cNvSpPr>
@@ -856,7 +856,7 @@
       </p:grpSpPr>
       <p:sp>
         <p:nvSpPr>
-          <p:cNvPr id="1197582427" name="Slide Image Placeholder 1"/>
+          <p:cNvPr id="1495245226" name="Slide Image Placeholder 1"/>
           <p:cNvSpPr>
             <a:spLocks noChangeAspect="1" noGrp="1" noRot="1"/>
           </p:cNvSpPr>
@@ -868,7 +868,7 @@
       </p:sp>
       <p:sp>
         <p:nvSpPr>
-          <p:cNvPr id="330010396" name="Notes Placeholder 2"/>
+          <p:cNvPr id="1078864882" name="Notes Placeholder 2"/>
           <p:cNvSpPr>
             <a:spLocks noGrp="1"/>
           </p:cNvSpPr>
@@ -890,7 +890,7 @@
       </p:sp>
       <p:sp>
         <p:nvSpPr>
-          <p:cNvPr id="1558444459" name="Slide Number Placeholder 3"/>
+          <p:cNvPr id="2077072548" name="Slide Number Placeholder 3"/>
           <p:cNvSpPr>
             <a:spLocks noGrp="1"/>
           </p:cNvSpPr>
@@ -941,7 +941,7 @@
       </p:grpSpPr>
       <p:sp>
         <p:nvSpPr>
-          <p:cNvPr id="717143946" name="Slide Image Placeholder 1"/>
+          <p:cNvPr id="137210301" name="Slide Image Placeholder 1"/>
           <p:cNvSpPr>
             <a:spLocks noChangeAspect="1" noGrp="1" noRot="1"/>
           </p:cNvSpPr>
@@ -953,7 +953,7 @@
       </p:sp>
       <p:sp>
         <p:nvSpPr>
-          <p:cNvPr id="549199842" name="Notes Placeholder 2"/>
+          <p:cNvPr id="483747577" name="Notes Placeholder 2"/>
           <p:cNvSpPr>
             <a:spLocks noGrp="1"/>
           </p:cNvSpPr>
@@ -975,7 +975,7 @@
       </p:sp>
       <p:sp>
         <p:nvSpPr>
-          <p:cNvPr id="1056780935" name="Slide Number Placeholder 3"/>
+          <p:cNvPr id="734179864" name="Slide Number Placeholder 3"/>
           <p:cNvSpPr>
             <a:spLocks noGrp="1"/>
           </p:cNvSpPr>
@@ -1026,7 +1026,7 @@
       </p:grpSpPr>
       <p:sp>
         <p:nvSpPr>
-          <p:cNvPr id="578814778" name="Título 1"/>
+          <p:cNvPr id="373302763" name="Título 1"/>
           <p:cNvSpPr>
             <a:spLocks noGrp="1"/>
           </p:cNvSpPr>
@@ -1061,7 +1061,7 @@
       </p:sp>
       <p:sp>
         <p:nvSpPr>
-          <p:cNvPr id="1502662000" name="Subtítulo 2"/>
+          <p:cNvPr id="793801198" name="Subtítulo 2"/>
           <p:cNvSpPr>
             <a:spLocks noGrp="1"/>
           </p:cNvSpPr>
@@ -1129,7 +1129,7 @@
       </p:sp>
       <p:sp>
         <p:nvSpPr>
-          <p:cNvPr id="1018793450" name="Marcador de fecha 3"/>
+          <p:cNvPr id="1109068012" name="Marcador de fecha 3"/>
           <p:cNvSpPr>
             <a:spLocks noGrp="1"/>
           </p:cNvSpPr>
@@ -1155,7 +1155,7 @@
       </p:sp>
       <p:sp>
         <p:nvSpPr>
-          <p:cNvPr id="1685980657" name="Marcador de pie de página 4"/>
+          <p:cNvPr id="1682237819" name="Marcador de pie de página 4"/>
           <p:cNvSpPr>
             <a:spLocks noGrp="1"/>
           </p:cNvSpPr>
@@ -1177,7 +1177,7 @@
       </p:sp>
       <p:sp>
         <p:nvSpPr>
-          <p:cNvPr id="610578962" name="Marcador de número de diapositiva 5"/>
+          <p:cNvPr id="1312279019" name="Marcador de número de diapositiva 5"/>
           <p:cNvSpPr>
             <a:spLocks noGrp="1"/>
           </p:cNvSpPr>
@@ -1228,7 +1228,7 @@
       </p:grpSpPr>
       <p:sp>
         <p:nvSpPr>
-          <p:cNvPr id="846456592" name="Título 1"/>
+          <p:cNvPr id="2142134631" name="Título 1"/>
           <p:cNvSpPr>
             <a:spLocks noGrp="1"/>
           </p:cNvSpPr>
@@ -1254,7 +1254,7 @@
       </p:sp>
       <p:sp>
         <p:nvSpPr>
-          <p:cNvPr id="590007769" name="Marcador de texto vertical 2"/>
+          <p:cNvPr id="1900420932" name="Marcador de texto vertical 2"/>
           <p:cNvSpPr>
             <a:spLocks noGrp="1"/>
           </p:cNvSpPr>
@@ -1320,7 +1320,7 @@
       </p:sp>
       <p:sp>
         <p:nvSpPr>
-          <p:cNvPr id="1720576763" name="Marcador de fecha 3"/>
+          <p:cNvPr id="667297754" name="Marcador de fecha 3"/>
           <p:cNvSpPr>
             <a:spLocks noGrp="1"/>
           </p:cNvSpPr>
@@ -1346,7 +1346,7 @@
       </p:sp>
       <p:sp>
         <p:nvSpPr>
-          <p:cNvPr id="1640537278" name="Marcador de pie de página 4"/>
+          <p:cNvPr id="1095570460" name="Marcador de pie de página 4"/>
           <p:cNvSpPr>
             <a:spLocks noGrp="1"/>
           </p:cNvSpPr>
@@ -1368,7 +1368,7 @@
       </p:sp>
       <p:sp>
         <p:nvSpPr>
-          <p:cNvPr id="1504373417" name="Marcador de número de diapositiva 5"/>
+          <p:cNvPr id="889248416" name="Marcador de número de diapositiva 5"/>
           <p:cNvSpPr>
             <a:spLocks noGrp="1"/>
           </p:cNvSpPr>
@@ -1419,7 +1419,7 @@
       </p:grpSpPr>
       <p:sp>
         <p:nvSpPr>
-          <p:cNvPr id="940919166" name="Título vertical 1"/>
+          <p:cNvPr id="761226863" name="Título vertical 1"/>
           <p:cNvSpPr>
             <a:spLocks noGrp="1"/>
           </p:cNvSpPr>
@@ -1450,7 +1450,7 @@
       </p:sp>
       <p:sp>
         <p:nvSpPr>
-          <p:cNvPr id="1692467762" name="Marcador de texto vertical 2"/>
+          <p:cNvPr id="1671330615" name="Marcador de texto vertical 2"/>
           <p:cNvSpPr>
             <a:spLocks noGrp="1"/>
           </p:cNvSpPr>
@@ -1521,7 +1521,7 @@
       </p:sp>
       <p:sp>
         <p:nvSpPr>
-          <p:cNvPr id="1239469818" name="Marcador de fecha 3"/>
+          <p:cNvPr id="1146779087" name="Marcador de fecha 3"/>
           <p:cNvSpPr>
             <a:spLocks noGrp="1"/>
           </p:cNvSpPr>
@@ -1547,7 +1547,7 @@
       </p:sp>
       <p:sp>
         <p:nvSpPr>
-          <p:cNvPr id="438690860" name="Marcador de pie de página 4"/>
+          <p:cNvPr id="798258575" name="Marcador de pie de página 4"/>
           <p:cNvSpPr>
             <a:spLocks noGrp="1"/>
           </p:cNvSpPr>
@@ -1569,7 +1569,7 @@
       </p:sp>
       <p:sp>
         <p:nvSpPr>
-          <p:cNvPr id="960271313" name="Marcador de número de diapositiva 5"/>
+          <p:cNvPr id="266687806" name="Marcador de número de diapositiva 5"/>
           <p:cNvSpPr>
             <a:spLocks noGrp="1"/>
           </p:cNvSpPr>
@@ -1620,7 +1620,7 @@
       </p:grpSpPr>
       <p:sp>
         <p:nvSpPr>
-          <p:cNvPr id="845956593" name="Title 1"/>
+          <p:cNvPr id="661441335" name="Title 1"/>
           <p:cNvSpPr>
             <a:spLocks noGrp="1"/>
           </p:cNvSpPr>
@@ -1646,7 +1646,7 @@
       </p:sp>
       <p:sp>
         <p:nvSpPr>
-          <p:cNvPr id="415117178" name="Marcador de contenido 2"/>
+          <p:cNvPr id="1687475703" name="Marcador de contenido 2"/>
           <p:cNvSpPr>
             <a:spLocks noGrp="1"/>
           </p:cNvSpPr>
@@ -1712,7 +1712,7 @@
       </p:sp>
       <p:sp>
         <p:nvSpPr>
-          <p:cNvPr id="1180035101" name="Marcador de fecha 3"/>
+          <p:cNvPr id="1548741497" name="Marcador de fecha 3"/>
           <p:cNvSpPr>
             <a:spLocks noGrp="1"/>
           </p:cNvSpPr>
@@ -1738,7 +1738,7 @@
       </p:sp>
       <p:sp>
         <p:nvSpPr>
-          <p:cNvPr id="920449961" name="Marcador de pie de página 4"/>
+          <p:cNvPr id="2044424769" name="Marcador de pie de página 4"/>
           <p:cNvSpPr>
             <a:spLocks noGrp="1"/>
           </p:cNvSpPr>
@@ -1760,7 +1760,7 @@
       </p:sp>
       <p:sp>
         <p:nvSpPr>
-          <p:cNvPr id="1837133065" name="Marcador de número de diapositiva 5"/>
+          <p:cNvPr id="2143100259" name="Marcador de número de diapositiva 5"/>
           <p:cNvSpPr>
             <a:spLocks noGrp="1"/>
           </p:cNvSpPr>
@@ -1811,7 +1811,7 @@
       </p:grpSpPr>
       <p:sp>
         <p:nvSpPr>
-          <p:cNvPr id="1146896201" name="Título 1"/>
+          <p:cNvPr id="1550617389" name="Título 1"/>
           <p:cNvSpPr>
             <a:spLocks noGrp="1"/>
           </p:cNvSpPr>
@@ -1846,7 +1846,7 @@
       </p:sp>
       <p:sp>
         <p:nvSpPr>
-          <p:cNvPr id="808672740" name="Marcador de texto 2"/>
+          <p:cNvPr id="2125549981" name="Marcador de texto 2"/>
           <p:cNvSpPr>
             <a:spLocks noGrp="1"/>
           </p:cNvSpPr>
@@ -1968,7 +1968,7 @@
       </p:sp>
       <p:sp>
         <p:nvSpPr>
-          <p:cNvPr id="409666737" name="Marcador de fecha 3"/>
+          <p:cNvPr id="1317956351" name="Marcador de fecha 3"/>
           <p:cNvSpPr>
             <a:spLocks noGrp="1"/>
           </p:cNvSpPr>
@@ -1994,7 +1994,7 @@
       </p:sp>
       <p:sp>
         <p:nvSpPr>
-          <p:cNvPr id="2099530527" name="Marcador de pie de página 4"/>
+          <p:cNvPr id="1293744450" name="Marcador de pie de página 4"/>
           <p:cNvSpPr>
             <a:spLocks noGrp="1"/>
           </p:cNvSpPr>
@@ -2016,7 +2016,7 @@
       </p:sp>
       <p:sp>
         <p:nvSpPr>
-          <p:cNvPr id="1036501499" name="Marcador de número de diapositiva 5"/>
+          <p:cNvPr id="1715432689" name="Marcador de número de diapositiva 5"/>
           <p:cNvSpPr>
             <a:spLocks noGrp="1"/>
           </p:cNvSpPr>
@@ -2067,7 +2067,7 @@
       </p:grpSpPr>
       <p:sp>
         <p:nvSpPr>
-          <p:cNvPr id="256365270" name="Título 1"/>
+          <p:cNvPr id="820061079" name="Título 1"/>
           <p:cNvSpPr>
             <a:spLocks noGrp="1"/>
           </p:cNvSpPr>
@@ -2093,7 +2093,7 @@
       </p:sp>
       <p:sp>
         <p:nvSpPr>
-          <p:cNvPr id="1029447985" name="Marcador de contenido 2"/>
+          <p:cNvPr id="647490922" name="Marcador de contenido 2"/>
           <p:cNvSpPr>
             <a:spLocks noGrp="1"/>
           </p:cNvSpPr>
@@ -2164,7 +2164,7 @@
       </p:sp>
       <p:sp>
         <p:nvSpPr>
-          <p:cNvPr id="1357426209" name="Marcador de contenido 3"/>
+          <p:cNvPr id="965212016" name="Marcador de contenido 3"/>
           <p:cNvSpPr>
             <a:spLocks noGrp="1"/>
           </p:cNvSpPr>
@@ -2235,7 +2235,7 @@
       </p:sp>
       <p:sp>
         <p:nvSpPr>
-          <p:cNvPr id="1942243765" name="Marcador de fecha 4"/>
+          <p:cNvPr id="1196968951" name="Marcador de fecha 4"/>
           <p:cNvSpPr>
             <a:spLocks noGrp="1"/>
           </p:cNvSpPr>
@@ -2261,7 +2261,7 @@
       </p:sp>
       <p:sp>
         <p:nvSpPr>
-          <p:cNvPr id="413123173" name="Marcador de pie de página 5"/>
+          <p:cNvPr id="745691416" name="Marcador de pie de página 5"/>
           <p:cNvSpPr>
             <a:spLocks noGrp="1"/>
           </p:cNvSpPr>
@@ -2283,7 +2283,7 @@
       </p:sp>
       <p:sp>
         <p:nvSpPr>
-          <p:cNvPr id="1897879432" name="Marcador de número de diapositiva 6"/>
+          <p:cNvPr id="892121073" name="Marcador de número de diapositiva 6"/>
           <p:cNvSpPr>
             <a:spLocks noGrp="1"/>
           </p:cNvSpPr>
@@ -2334,7 +2334,7 @@
       </p:grpSpPr>
       <p:sp>
         <p:nvSpPr>
-          <p:cNvPr id="238321977" name="Título 1"/>
+          <p:cNvPr id="1522327526" name="Título 1"/>
           <p:cNvSpPr>
             <a:spLocks noGrp="1"/>
           </p:cNvSpPr>
@@ -2365,7 +2365,7 @@
       </p:sp>
       <p:sp>
         <p:nvSpPr>
-          <p:cNvPr id="1746687751" name="Marcador de texto 2"/>
+          <p:cNvPr id="1682958684" name="Marcador de texto 2"/>
           <p:cNvSpPr>
             <a:spLocks noGrp="1"/>
           </p:cNvSpPr>
@@ -2433,7 +2433,7 @@
       </p:sp>
       <p:sp>
         <p:nvSpPr>
-          <p:cNvPr id="2069208296" name="Marcador de contenido 3"/>
+          <p:cNvPr id="1637171635" name="Marcador de contenido 3"/>
           <p:cNvSpPr>
             <a:spLocks noGrp="1"/>
           </p:cNvSpPr>
@@ -2504,7 +2504,7 @@
       </p:sp>
       <p:sp>
         <p:nvSpPr>
-          <p:cNvPr id="609705953" name="Marcador de texto 4"/>
+          <p:cNvPr id="2013460277" name="Marcador de texto 4"/>
           <p:cNvSpPr>
             <a:spLocks noGrp="1"/>
           </p:cNvSpPr>
@@ -2572,7 +2572,7 @@
       </p:sp>
       <p:sp>
         <p:nvSpPr>
-          <p:cNvPr id="1146791880" name="Marcador de contenido 5"/>
+          <p:cNvPr id="1043131020" name="Marcador de contenido 5"/>
           <p:cNvSpPr>
             <a:spLocks noGrp="1"/>
           </p:cNvSpPr>
@@ -2643,7 +2643,7 @@
       </p:sp>
       <p:sp>
         <p:nvSpPr>
-          <p:cNvPr id="950448305" name="Marcador de fecha 6"/>
+          <p:cNvPr id="944217561" name="Marcador de fecha 6"/>
           <p:cNvSpPr>
             <a:spLocks noGrp="1"/>
           </p:cNvSpPr>
@@ -2669,7 +2669,7 @@
       </p:sp>
       <p:sp>
         <p:nvSpPr>
-          <p:cNvPr id="904605962" name="Marcador de pie de página 7"/>
+          <p:cNvPr id="311609214" name="Marcador de pie de página 7"/>
           <p:cNvSpPr>
             <a:spLocks noGrp="1"/>
           </p:cNvSpPr>
@@ -2691,7 +2691,7 @@
       </p:sp>
       <p:sp>
         <p:nvSpPr>
-          <p:cNvPr id="1798106726" name="Marcador de número de diapositiva 8"/>
+          <p:cNvPr id="1031197968" name="Marcador de número de diapositiva 8"/>
           <p:cNvSpPr>
             <a:spLocks noGrp="1"/>
           </p:cNvSpPr>
@@ -2742,7 +2742,7 @@
       </p:grpSpPr>
       <p:sp>
         <p:nvSpPr>
-          <p:cNvPr id="909215216" name="Título 1"/>
+          <p:cNvPr id="200521717" name="Título 1"/>
           <p:cNvSpPr>
             <a:spLocks noGrp="1"/>
           </p:cNvSpPr>
@@ -2768,7 +2768,7 @@
       </p:sp>
       <p:sp>
         <p:nvSpPr>
-          <p:cNvPr id="775508678" name="Marcador de fecha 2"/>
+          <p:cNvPr id="2319555" name="Marcador de fecha 2"/>
           <p:cNvSpPr>
             <a:spLocks noGrp="1"/>
           </p:cNvSpPr>
@@ -2794,7 +2794,7 @@
       </p:sp>
       <p:sp>
         <p:nvSpPr>
-          <p:cNvPr id="1781480033" name="Marcador de pie de página 3"/>
+          <p:cNvPr id="1522936710" name="Marcador de pie de página 3"/>
           <p:cNvSpPr>
             <a:spLocks noGrp="1"/>
           </p:cNvSpPr>
@@ -2816,7 +2816,7 @@
       </p:sp>
       <p:sp>
         <p:nvSpPr>
-          <p:cNvPr id="1120925248" name="Marcador de número de diapositiva 4"/>
+          <p:cNvPr id="2003643457" name="Marcador de número de diapositiva 4"/>
           <p:cNvSpPr>
             <a:spLocks noGrp="1"/>
           </p:cNvSpPr>
@@ -2867,7 +2867,7 @@
       </p:grpSpPr>
       <p:sp>
         <p:nvSpPr>
-          <p:cNvPr id="80701868" name="Marcador de fecha 1"/>
+          <p:cNvPr id="732646195" name="Marcador de fecha 1"/>
           <p:cNvSpPr>
             <a:spLocks noGrp="1"/>
           </p:cNvSpPr>
@@ -2893,7 +2893,7 @@
       </p:sp>
       <p:sp>
         <p:nvSpPr>
-          <p:cNvPr id="1721005029" name="Marcador de pie de página 2"/>
+          <p:cNvPr id="659343155" name="Marcador de pie de página 2"/>
           <p:cNvSpPr>
             <a:spLocks noGrp="1"/>
           </p:cNvSpPr>
@@ -2915,7 +2915,7 @@
       </p:sp>
       <p:sp>
         <p:nvSpPr>
-          <p:cNvPr id="1056871330" name="Marcador de número de diapositiva 3"/>
+          <p:cNvPr id="1175986686" name="Marcador de número de diapositiva 3"/>
           <p:cNvSpPr>
             <a:spLocks noGrp="1"/>
           </p:cNvSpPr>
@@ -2966,7 +2966,7 @@
       </p:grpSpPr>
       <p:sp>
         <p:nvSpPr>
-          <p:cNvPr id="550889192" name="Título 1"/>
+          <p:cNvPr id="1963838364" name="Título 1"/>
           <p:cNvSpPr>
             <a:spLocks noGrp="1"/>
           </p:cNvSpPr>
@@ -3001,7 +3001,7 @@
       </p:sp>
       <p:sp>
         <p:nvSpPr>
-          <p:cNvPr id="1482101889" name="Marcador de contenido 2"/>
+          <p:cNvPr id="397898277" name="Marcador de contenido 2"/>
           <p:cNvSpPr>
             <a:spLocks noGrp="1"/>
           </p:cNvSpPr>
@@ -3100,7 +3100,7 @@
       </p:sp>
       <p:sp>
         <p:nvSpPr>
-          <p:cNvPr id="1858565601" name="Marcador de texto 3"/>
+          <p:cNvPr id="1659709949" name="Marcador de texto 3"/>
           <p:cNvSpPr>
             <a:spLocks noGrp="1"/>
           </p:cNvSpPr>
@@ -3168,7 +3168,7 @@
       </p:sp>
       <p:sp>
         <p:nvSpPr>
-          <p:cNvPr id="2018267799" name="Marcador de fecha 4"/>
+          <p:cNvPr id="1480156506" name="Marcador de fecha 4"/>
           <p:cNvSpPr>
             <a:spLocks noGrp="1"/>
           </p:cNvSpPr>
@@ -3194,7 +3194,7 @@
       </p:sp>
       <p:sp>
         <p:nvSpPr>
-          <p:cNvPr id="820014966" name="Marcador de pie de página 5"/>
+          <p:cNvPr id="978553348" name="Marcador de pie de página 5"/>
           <p:cNvSpPr>
             <a:spLocks noGrp="1"/>
           </p:cNvSpPr>
@@ -3216,7 +3216,7 @@
       </p:sp>
       <p:sp>
         <p:nvSpPr>
-          <p:cNvPr id="1531720865" name="Marcador de número de diapositiva 6"/>
+          <p:cNvPr id="851733460" name="Marcador de número de diapositiva 6"/>
           <p:cNvSpPr>
             <a:spLocks noGrp="1"/>
           </p:cNvSpPr>
@@ -3267,7 +3267,7 @@
       </p:grpSpPr>
       <p:sp>
         <p:nvSpPr>
-          <p:cNvPr id="2056048465" name="Título 1"/>
+          <p:cNvPr id="309887935" name="Título 1"/>
           <p:cNvSpPr>
             <a:spLocks noGrp="1"/>
           </p:cNvSpPr>
@@ -3302,7 +3302,7 @@
       </p:sp>
       <p:sp>
         <p:nvSpPr>
-          <p:cNvPr id="699060687" name="Marcador de posición de imagen 2"/>
+          <p:cNvPr id="1981656723" name="Marcador de posición de imagen 2"/>
           <p:cNvSpPr>
             <a:spLocks noChangeAspect="1" noGrp="1"/>
           </p:cNvSpPr>
@@ -3370,7 +3370,7 @@
       </p:sp>
       <p:sp>
         <p:nvSpPr>
-          <p:cNvPr id="59889175" name="Marcador de texto 3"/>
+          <p:cNvPr id="1833778803" name="Marcador de texto 3"/>
           <p:cNvSpPr>
             <a:spLocks noGrp="1"/>
           </p:cNvSpPr>
@@ -3438,7 +3438,7 @@
       </p:sp>
       <p:sp>
         <p:nvSpPr>
-          <p:cNvPr id="554882879" name="Marcador de fecha 4"/>
+          <p:cNvPr id="1996951972" name="Marcador de fecha 4"/>
           <p:cNvSpPr>
             <a:spLocks noGrp="1"/>
           </p:cNvSpPr>
@@ -3464,7 +3464,7 @@
       </p:sp>
       <p:sp>
         <p:nvSpPr>
-          <p:cNvPr id="1795434338" name="Marcador de pie de página 5"/>
+          <p:cNvPr id="1290615816" name="Marcador de pie de página 5"/>
           <p:cNvSpPr>
             <a:spLocks noGrp="1"/>
           </p:cNvSpPr>
@@ -3486,7 +3486,7 @@
       </p:sp>
       <p:sp>
         <p:nvSpPr>
-          <p:cNvPr id="719731142" name="Marcador de número de diapositiva 6"/>
+          <p:cNvPr id="2006958398" name="Marcador de número de diapositiva 6"/>
           <p:cNvSpPr>
             <a:spLocks noGrp="1"/>
           </p:cNvSpPr>
@@ -3542,7 +3542,7 @@
       </p:grpSpPr>
       <p:sp>
         <p:nvSpPr>
-          <p:cNvPr id="2002062938" name="Marcador de título 1"/>
+          <p:cNvPr id="41364839" name="Marcador de título 1"/>
           <p:cNvSpPr>
             <a:spLocks noGrp="1"/>
           </p:cNvSpPr>
@@ -3578,7 +3578,7 @@
       </p:sp>
       <p:sp>
         <p:nvSpPr>
-          <p:cNvPr id="1294617864" name="Marcador de texto 2"/>
+          <p:cNvPr id="1860737481" name="Marcador de texto 2"/>
           <p:cNvSpPr>
             <a:spLocks noGrp="1"/>
           </p:cNvSpPr>
@@ -3654,7 +3654,7 @@
       </p:sp>
       <p:sp>
         <p:nvSpPr>
-          <p:cNvPr id="1120638229" name="Marcador de fecha 3"/>
+          <p:cNvPr id="639092716" name="Marcador de fecha 3"/>
           <p:cNvSpPr>
             <a:spLocks noGrp="1"/>
           </p:cNvSpPr>
@@ -3698,7 +3698,7 @@
       </p:sp>
       <p:sp>
         <p:nvSpPr>
-          <p:cNvPr id="1448407602" name="Marcador de pie de página 4"/>
+          <p:cNvPr id="1822545164" name="Marcador de pie de página 4"/>
           <p:cNvSpPr>
             <a:spLocks noGrp="1"/>
           </p:cNvSpPr>
@@ -3738,7 +3738,7 @@
       </p:sp>
       <p:sp>
         <p:nvSpPr>
-          <p:cNvPr id="1064182436" name="Marcador de número de diapositiva 5"/>
+          <p:cNvPr id="1289029116" name="Marcador de número de diapositiva 5"/>
           <p:cNvSpPr>
             <a:spLocks noGrp="1"/>
           </p:cNvSpPr>
@@ -4098,7 +4098,7 @@
       </p:grpSpPr>
       <p:pic>
         <p:nvPicPr>
-          <p:cNvPr id="680685211" name=""/>
+          <p:cNvPr id="576519433" name=""/>
           <p:cNvPicPr>
             <a:picLocks noChangeAspect="1"/>
           </p:cNvPicPr>
@@ -4121,7 +4121,7 @@
       </p:pic>
       <p:sp>
         <p:nvSpPr>
-          <p:cNvPr id="2013714891" name="Título 1"/>
+          <p:cNvPr id="1464555483" name="Título 1"/>
           <p:cNvSpPr>
             <a:spLocks noGrp="1"/>
           </p:cNvSpPr>
@@ -4185,7 +4185,7 @@
       </p:sp>
       <p:sp>
         <p:nvSpPr>
-          <p:cNvPr id="1222763654" name="Subtítulo 2"/>
+          <p:cNvPr id="925581796" name="Subtítulo 2"/>
           <p:cNvSpPr>
             <a:spLocks noGrp="1"/>
           </p:cNvSpPr>
@@ -4194,7 +4194,7 @@
           </p:nvPr>
         </p:nvSpPr>
         <p:spPr bwMode="auto">
-          <a:xfrm rot="21317759">
+          <a:xfrm rot="21317758">
             <a:off x="819344" y="3051271"/>
             <a:ext cx="9144000" cy="1655761"/>
           </a:xfrm>
@@ -4215,7 +4215,7 @@
                 <a:ea typeface="Caladea"/>
                 <a:cs typeface="Caladea"/>
               </a:rPr>
-              <a:t>“Transformando Bases de Datos complejas en historias comprensibles, evidencia auditable y gráficos al instante mediante un asistente conversional inteligente”.</a:t>
+              <a:t>“Transformando Bases de Datos complejos en historias comprensibles, evidencia auditable y gráficos al instante mediante un asistente inteligente”.</a:t>
             </a:r>
             <a:endParaRPr i="1">
               <a:solidFill>
@@ -4229,7 +4229,7 @@
       </p:sp>
       <p:sp>
         <p:nvSpPr>
-          <p:cNvPr id="439491850" name=""/>
+          <p:cNvPr id="144033511" name=""/>
           <p:cNvSpPr txBox="1"/>
           <p:nvPr/>
         </p:nvSpPr>
@@ -4269,7 +4269,7 @@
       </p:sp>
       <p:sp>
         <p:nvSpPr>
-          <p:cNvPr id="1023736472" name=""/>
+          <p:cNvPr id="1516901519" name=""/>
           <p:cNvSpPr txBox="1"/>
           <p:nvPr/>
         </p:nvSpPr>
@@ -4334,7 +4334,7 @@
       </p:grpSpPr>
       <p:sp>
         <p:nvSpPr>
-          <p:cNvPr id="1440326218" name=""/>
+          <p:cNvPr id="2054211361" name=""/>
           <p:cNvSpPr/>
           <p:nvPr/>
         </p:nvSpPr>
@@ -4393,7 +4393,7 @@
       </p:sp>
       <p:sp>
         <p:nvSpPr>
-          <p:cNvPr id="1124772959" name="Title 1"/>
+          <p:cNvPr id="1509992309" name="Title 1"/>
           <p:cNvSpPr>
             <a:spLocks noGrp="1"/>
           </p:cNvSpPr>
@@ -4437,7 +4437,7 @@
       </p:sp>
       <p:sp>
         <p:nvSpPr>
-          <p:cNvPr id="474705523" name=""/>
+          <p:cNvPr id="1767037984" name=""/>
           <p:cNvSpPr/>
           <p:nvPr/>
         </p:nvSpPr>
@@ -4498,7 +4498,7 @@
       </p:sp>
       <p:sp>
         <p:nvSpPr>
-          <p:cNvPr id="2107464511" name="Marcador de contenido 2"/>
+          <p:cNvPr id="1662402234" name="Marcador de contenido 2"/>
           <p:cNvSpPr>
             <a:spLocks noGrp="1"/>
           </p:cNvSpPr>
@@ -4581,7 +4581,7 @@
       </p:sp>
       <p:sp>
         <p:nvSpPr>
-          <p:cNvPr id="976515095" name=""/>
+          <p:cNvPr id="1667652964" name=""/>
           <p:cNvSpPr/>
           <p:nvPr/>
         </p:nvSpPr>
@@ -4642,7 +4642,7 @@
       </p:sp>
       <p:sp>
         <p:nvSpPr>
-          <p:cNvPr id="312074234" name="Marcador de contenido 2"/>
+          <p:cNvPr id="1970493722" name="Marcador de contenido 2"/>
           <p:cNvSpPr>
             <a:spLocks noGrp="1"/>
           </p:cNvSpPr>
@@ -4877,7 +4877,7 @@
       </p:sp>
       <p:sp>
         <p:nvSpPr>
-          <p:cNvPr id="1353462914" name=""/>
+          <p:cNvPr id="827365124" name=""/>
           <p:cNvSpPr/>
           <p:nvPr/>
         </p:nvSpPr>
@@ -4938,7 +4938,7 @@
       </p:sp>
       <p:sp>
         <p:nvSpPr>
-          <p:cNvPr id="1544886614" name="Marcador de contenido 2"/>
+          <p:cNvPr id="280275613" name="Marcador de contenido 2"/>
           <p:cNvSpPr>
             <a:spLocks noGrp="1"/>
           </p:cNvSpPr>
@@ -5173,7 +5173,7 @@
       </p:sp>
       <p:sp>
         <p:nvSpPr>
-          <p:cNvPr id="2054167976" name=""/>
+          <p:cNvPr id="1871276824" name=""/>
           <p:cNvSpPr/>
           <p:nvPr/>
         </p:nvSpPr>
@@ -5220,7 +5220,7 @@
       </p:sp>
       <p:pic>
         <p:nvPicPr>
-          <p:cNvPr id="1355212576" name=""/>
+          <p:cNvPr id="1596795148" name=""/>
           <p:cNvPicPr>
             <a:picLocks noChangeAspect="1"/>
           </p:cNvPicPr>
@@ -5241,7 +5241,7 @@
       </p:pic>
       <p:pic>
         <p:nvPicPr>
-          <p:cNvPr id="1417231553" name=""/>
+          <p:cNvPr id="1952860638" name=""/>
           <p:cNvPicPr>
             <a:picLocks noChangeAspect="1"/>
           </p:cNvPicPr>
@@ -5262,7 +5262,7 @@
       </p:pic>
       <p:pic>
         <p:nvPicPr>
-          <p:cNvPr id="30641293" name=""/>
+          <p:cNvPr id="97404269" name=""/>
           <p:cNvPicPr>
             <a:picLocks noChangeAspect="1"/>
           </p:cNvPicPr>
@@ -5273,7 +5273,7 @@
         </p:blipFill>
         <p:spPr bwMode="auto">
           <a:xfrm flipH="0" flipV="0">
-            <a:off x="3221287" y="3711948"/>
+            <a:off x="3274948" y="3711947"/>
             <a:ext cx="3209521" cy="2406526"/>
           </a:xfrm>
           <a:prstGeom prst="rect">
@@ -5316,7 +5316,7 @@
       </p:grpSpPr>
       <p:sp>
         <p:nvSpPr>
-          <p:cNvPr id="508831704" name=""/>
+          <p:cNvPr id="1777896626" name=""/>
           <p:cNvSpPr/>
           <p:nvPr/>
         </p:nvSpPr>
@@ -5375,7 +5375,7 @@
       </p:sp>
       <p:sp>
         <p:nvSpPr>
-          <p:cNvPr id="1410200177" name="Title 1"/>
+          <p:cNvPr id="85678143" name="Title 1"/>
           <p:cNvSpPr>
             <a:spLocks noGrp="1"/>
           </p:cNvSpPr>
@@ -5419,7 +5419,7 @@
       </p:sp>
       <p:sp>
         <p:nvSpPr>
-          <p:cNvPr id="1865223996" name=""/>
+          <p:cNvPr id="1373621575" name=""/>
           <p:cNvSpPr/>
           <p:nvPr/>
         </p:nvSpPr>
@@ -5480,7 +5480,7 @@
       </p:sp>
       <p:sp>
         <p:nvSpPr>
-          <p:cNvPr id="1967519353" name="Marcador de contenido 2"/>
+          <p:cNvPr id="1898730152" name="Marcador de contenido 2"/>
           <p:cNvSpPr>
             <a:spLocks noGrp="1"/>
           </p:cNvSpPr>
@@ -5552,7 +5552,7 @@
       </p:sp>
       <p:sp>
         <p:nvSpPr>
-          <p:cNvPr id="7343625" name=""/>
+          <p:cNvPr id="1569967808" name=""/>
           <p:cNvSpPr/>
           <p:nvPr/>
         </p:nvSpPr>
@@ -5613,7 +5613,7 @@
       </p:sp>
       <p:sp>
         <p:nvSpPr>
-          <p:cNvPr id="1233758343" name="Marcador de contenido 2"/>
+          <p:cNvPr id="782472959" name="Marcador de contenido 2"/>
           <p:cNvSpPr>
             <a:spLocks noGrp="1"/>
           </p:cNvSpPr>
@@ -5848,7 +5848,7 @@
       </p:sp>
       <p:sp>
         <p:nvSpPr>
-          <p:cNvPr id="1407711344" name=""/>
+          <p:cNvPr id="1024854898" name=""/>
           <p:cNvSpPr/>
           <p:nvPr/>
         </p:nvSpPr>
@@ -5909,7 +5909,7 @@
       </p:sp>
       <p:sp>
         <p:nvSpPr>
-          <p:cNvPr id="1675976595" name="Marcador de contenido 2"/>
+          <p:cNvPr id="7731383" name="Marcador de contenido 2"/>
           <p:cNvSpPr>
             <a:spLocks noGrp="1"/>
           </p:cNvSpPr>
@@ -5917,13 +5917,13 @@
         </p:nvSpPr>
         <p:spPr bwMode="auto">
           <a:xfrm flipH="0" flipV="0">
-            <a:off x="577110" y="5253876"/>
-            <a:ext cx="4458012" cy="999564"/>
+            <a:off x="518997" y="5237621"/>
+            <a:ext cx="4458011" cy="1172144"/>
           </a:xfrm>
         </p:spPr>
         <p:txBody>
-          <a:bodyPr vert="horz" lIns="91440" tIns="45720" rIns="91440" bIns="45720" rtlCol="0">
-            <a:normAutofit/>
+          <a:bodyPr vertOverflow="overflow" horzOverflow="overflow" vert="horz" wrap="square" lIns="91440" tIns="45720" rIns="91440" bIns="45720" numCol="1" spcCol="0" rtlCol="0" fromWordArt="0" anchor="t" anchorCtr="0" forceAA="0" upright="0" compatLnSpc="0">
+            <a:normAutofit fontScale="90000" lnSpcReduction="2000"/>
           </a:bodyPr>
           <a:lstStyle>
             <a:lvl1pPr marL="228600" indent="-228600" algn="l" defTabSz="914400" rtl="0">
@@ -6125,7 +6125,7 @@
               <a:defRPr/>
             </a:pPr>
             <a:r>
-              <a:rPr lang="es-ES" sz="1800" b="0" i="0" u="none" strike="noStrike" cap="none" spc="0">
+              <a:rPr lang="es-ES" sz="2000" b="0" i="0" u="none" strike="noStrike" cap="none" spc="0">
                 <a:solidFill>
                   <a:schemeClr val="tx1"/>
                 </a:solidFill>
@@ -6133,7 +6133,7 @@
                 <a:ea typeface="Caladea"/>
                 <a:cs typeface="Caladea"/>
               </a:rPr>
-              <a:t>Cada afirmación enlaza su fuente directa a cómputos distritales oficiales.</a:t>
+              <a:t>Ningún dato requiere fe ciega. Cada cifra publicada incluye un enlace directo al acta de cómputo distrital oficial que la respalda.</a:t>
             </a:r>
             <a:endParaRPr>
               <a:latin typeface="Caladea"/>
@@ -6144,7 +6144,7 @@
       </p:sp>
       <p:sp>
         <p:nvSpPr>
-          <p:cNvPr id="1341153633" name=""/>
+          <p:cNvPr id="1569047279" name=""/>
           <p:cNvSpPr/>
           <p:nvPr/>
         </p:nvSpPr>
@@ -6191,7 +6191,7 @@
       </p:sp>
       <p:pic>
         <p:nvPicPr>
-          <p:cNvPr id="823993117" name=""/>
+          <p:cNvPr id="2002912543" name=""/>
           <p:cNvPicPr>
             <a:picLocks noChangeAspect="1"/>
           </p:cNvPicPr>
@@ -6201,7 +6201,7 @@
           <a:blip r:embed="rId3"/>
         </p:blipFill>
         <p:spPr bwMode="auto">
-          <a:xfrm rot="20854180" flipH="0" flipV="0">
+          <a:xfrm rot="20854179" flipH="0" flipV="0">
             <a:off x="3757303" y="1429620"/>
             <a:ext cx="3134433" cy="1763119"/>
           </a:xfrm>
@@ -6212,7 +6212,7 @@
       </p:pic>
       <p:pic>
         <p:nvPicPr>
-          <p:cNvPr id="1316517101" name=""/>
+          <p:cNvPr id="1288235896" name=""/>
           <p:cNvPicPr>
             <a:picLocks noChangeAspect="1"/>
           </p:cNvPicPr>
@@ -6233,7 +6233,7 @@
       </p:pic>
       <p:pic>
         <p:nvPicPr>
-          <p:cNvPr id="422290684" name=""/>
+          <p:cNvPr id="1370243458" name=""/>
           <p:cNvPicPr>
             <a:picLocks noChangeAspect="1"/>
           </p:cNvPicPr>
@@ -6291,7 +6291,7 @@
       </p:grpSpPr>
       <p:sp>
         <p:nvSpPr>
-          <p:cNvPr id="1127978159" name=""/>
+          <p:cNvPr id="1663589206" name=""/>
           <p:cNvSpPr/>
           <p:nvPr/>
         </p:nvSpPr>
@@ -6350,7 +6350,7 @@
       </p:sp>
       <p:sp>
         <p:nvSpPr>
-          <p:cNvPr id="582513063" name="Title 1"/>
+          <p:cNvPr id="228283236" name="Title 1"/>
           <p:cNvSpPr>
             <a:spLocks noGrp="1"/>
           </p:cNvSpPr>
@@ -6394,7 +6394,7 @@
       </p:sp>
       <p:sp>
         <p:nvSpPr>
-          <p:cNvPr id="1667624361" name=""/>
+          <p:cNvPr id="642741143" name=""/>
           <p:cNvSpPr/>
           <p:nvPr/>
         </p:nvSpPr>
@@ -6455,7 +6455,7 @@
       </p:sp>
       <p:sp>
         <p:nvSpPr>
-          <p:cNvPr id="55750375" name="Marcador de contenido 2"/>
+          <p:cNvPr id="1707267879" name="Marcador de contenido 2"/>
           <p:cNvSpPr>
             <a:spLocks noGrp="1"/>
           </p:cNvSpPr>
@@ -6464,7 +6464,7 @@
           </p:nvPr>
         </p:nvSpPr>
         <p:spPr bwMode="auto">
-          <a:xfrm rot="21087643" flipH="0" flipV="0">
+          <a:xfrm rot="21087642" flipH="0" flipV="0">
             <a:off x="6626973" y="1649194"/>
             <a:ext cx="4458012" cy="1011891"/>
           </a:xfrm>
@@ -6527,7 +6527,7 @@
       </p:sp>
       <p:sp>
         <p:nvSpPr>
-          <p:cNvPr id="1932915578" name=""/>
+          <p:cNvPr id="859987779" name=""/>
           <p:cNvSpPr/>
           <p:nvPr/>
         </p:nvSpPr>
@@ -6588,14 +6588,14 @@
       </p:sp>
       <p:sp>
         <p:nvSpPr>
-          <p:cNvPr id="1884449961" name="Marcador de contenido 2"/>
+          <p:cNvPr id="1984176360" name="Marcador de contenido 2"/>
           <p:cNvSpPr>
             <a:spLocks noGrp="1"/>
           </p:cNvSpPr>
           <p:nvPr/>
         </p:nvSpPr>
         <p:spPr bwMode="auto">
-          <a:xfrm rot="20849094" flipH="0" flipV="0">
+          <a:xfrm rot="20849093" flipH="0" flipV="0">
             <a:off x="1149676" y="4642694"/>
             <a:ext cx="4302024" cy="999565"/>
           </a:xfrm>
@@ -6823,7 +6823,7 @@
       </p:sp>
       <p:sp>
         <p:nvSpPr>
-          <p:cNvPr id="680974005" name=""/>
+          <p:cNvPr id="1615557045" name=""/>
           <p:cNvSpPr/>
           <p:nvPr/>
         </p:nvSpPr>
@@ -6884,7 +6884,7 @@
       </p:sp>
       <p:sp>
         <p:nvSpPr>
-          <p:cNvPr id="551800772" name="Marcador de contenido 2"/>
+          <p:cNvPr id="264926744" name="Marcador de contenido 2"/>
           <p:cNvSpPr>
             <a:spLocks noGrp="1"/>
           </p:cNvSpPr>
@@ -7119,7 +7119,7 @@
       </p:sp>
       <p:sp>
         <p:nvSpPr>
-          <p:cNvPr id="1025030964" name=""/>
+          <p:cNvPr id="1416615304" name=""/>
           <p:cNvSpPr/>
           <p:nvPr/>
         </p:nvSpPr>
@@ -7166,7 +7166,7 @@
       </p:sp>
       <p:sp>
         <p:nvSpPr>
-          <p:cNvPr id="895876533" name=""/>
+          <p:cNvPr id="1662667117" name=""/>
           <p:cNvSpPr/>
           <p:nvPr/>
         </p:nvSpPr>
@@ -7227,7 +7227,7 @@
       </p:sp>
       <p:sp>
         <p:nvSpPr>
-          <p:cNvPr id="667935290" name="Marcador de contenido 2"/>
+          <p:cNvPr id="2113515307" name="Marcador de contenido 2"/>
           <p:cNvSpPr>
             <a:spLocks noGrp="1"/>
           </p:cNvSpPr>
@@ -7451,7 +7451,7 @@
                 <a:ea typeface="Caladea"/>
                 <a:cs typeface="Caladea"/>
               </a:rPr>
-              <a:t>Desplegable metodológico para usuarios que requieren auditar el cálculo.</a:t>
+              <a:t>Sección desplegable con el paso a paso del cálculo para quienes deseen verificarlo.</a:t>
             </a:r>
             <a:endParaRPr>
               <a:latin typeface="Caladea"/>
@@ -7462,7 +7462,7 @@
       </p:sp>
       <p:pic>
         <p:nvPicPr>
-          <p:cNvPr id="1866819889" name=""/>
+          <p:cNvPr id="1749182613" name=""/>
           <p:cNvPicPr>
             <a:picLocks noChangeAspect="1"/>
           </p:cNvPicPr>
@@ -7484,7 +7484,7 @@
       </p:pic>
       <p:pic>
         <p:nvPicPr>
-          <p:cNvPr id="2096844715" name=""/>
+          <p:cNvPr id="1486825238" name=""/>
           <p:cNvPicPr>
             <a:picLocks noChangeAspect="1"/>
           </p:cNvPicPr>
@@ -7505,7 +7505,7 @@
       </p:pic>
       <p:pic>
         <p:nvPicPr>
-          <p:cNvPr id="2143319422" name=""/>
+          <p:cNvPr id="2010892007" name=""/>
           <p:cNvPicPr>
             <a:picLocks noChangeAspect="1"/>
           </p:cNvPicPr>
@@ -7515,7 +7515,7 @@
           <a:blip r:embed="rId5"/>
         </p:blipFill>
         <p:spPr bwMode="auto">
-          <a:xfrm rot="21020385" flipH="0" flipV="0">
+          <a:xfrm rot="21020384" flipH="0" flipV="0">
             <a:off x="5038006" y="4409072"/>
             <a:ext cx="1301598" cy="1301598"/>
           </a:xfrm>
@@ -7526,7 +7526,7 @@
       </p:pic>
       <p:pic>
         <p:nvPicPr>
-          <p:cNvPr id="39540785" name=""/>
+          <p:cNvPr id="1474449594" name=""/>
           <p:cNvPicPr>
             <a:picLocks noChangeAspect="1"/>
           </p:cNvPicPr>
@@ -7537,7 +7537,7 @@
           <a:stretch/>
         </p:blipFill>
         <p:spPr bwMode="auto">
-          <a:xfrm rot="2036891" flipH="0" flipV="0">
+          <a:xfrm rot="2036890" flipH="0" flipV="0">
             <a:off x="10882058" y="3691317"/>
             <a:ext cx="638735" cy="638735"/>
           </a:xfrm>
@@ -7581,7 +7581,7 @@
       </p:grpSpPr>
       <p:sp>
         <p:nvSpPr>
-          <p:cNvPr id="1115648319" name=""/>
+          <p:cNvPr id="1822591855" name=""/>
           <p:cNvSpPr/>
           <p:nvPr/>
         </p:nvSpPr>
@@ -7640,7 +7640,7 @@
       </p:sp>
       <p:sp>
         <p:nvSpPr>
-          <p:cNvPr id="1398027464" name="Title 1"/>
+          <p:cNvPr id="1074477018" name="Title 1"/>
           <p:cNvSpPr>
             <a:spLocks noGrp="1"/>
           </p:cNvSpPr>
@@ -7684,7 +7684,7 @@
       </p:sp>
       <p:sp>
         <p:nvSpPr>
-          <p:cNvPr id="323196003" name=""/>
+          <p:cNvPr id="1035511837" name=""/>
           <p:cNvSpPr/>
           <p:nvPr/>
         </p:nvSpPr>
@@ -7745,7 +7745,7 @@
       </p:sp>
       <p:sp>
         <p:nvSpPr>
-          <p:cNvPr id="1176650266" name="Marcador de contenido 2"/>
+          <p:cNvPr id="936063381" name="Marcador de contenido 2"/>
           <p:cNvSpPr>
             <a:spLocks noGrp="1"/>
           </p:cNvSpPr>
@@ -7817,7 +7817,7 @@
       </p:sp>
       <p:sp>
         <p:nvSpPr>
-          <p:cNvPr id="31693130" name=""/>
+          <p:cNvPr id="89390819" name=""/>
           <p:cNvSpPr/>
           <p:nvPr/>
         </p:nvSpPr>
@@ -7878,7 +7878,7 @@
       </p:sp>
       <p:sp>
         <p:nvSpPr>
-          <p:cNvPr id="297545819" name="Marcador de contenido 2"/>
+          <p:cNvPr id="239894517" name="Marcador de contenido 2"/>
           <p:cNvSpPr>
             <a:spLocks noGrp="1"/>
           </p:cNvSpPr>
@@ -8113,7 +8113,7 @@
       </p:sp>
       <p:sp>
         <p:nvSpPr>
-          <p:cNvPr id="1386569388" name=""/>
+          <p:cNvPr id="1753060158" name=""/>
           <p:cNvSpPr/>
           <p:nvPr/>
         </p:nvSpPr>
@@ -8174,7 +8174,7 @@
       </p:sp>
       <p:sp>
         <p:nvSpPr>
-          <p:cNvPr id="1706633345" name="Marcador de contenido 2"/>
+          <p:cNvPr id="1362681970" name="Marcador de contenido 2"/>
           <p:cNvSpPr>
             <a:spLocks noGrp="1"/>
           </p:cNvSpPr>
@@ -8409,7 +8409,7 @@
       </p:sp>
       <p:sp>
         <p:nvSpPr>
-          <p:cNvPr id="1613456747" name=""/>
+          <p:cNvPr id="588309099" name=""/>
           <p:cNvSpPr/>
           <p:nvPr/>
         </p:nvSpPr>
@@ -8456,7 +8456,7 @@
       </p:sp>
       <p:sp>
         <p:nvSpPr>
-          <p:cNvPr id="342537697" name=""/>
+          <p:cNvPr id="1367894922" name=""/>
           <p:cNvSpPr/>
           <p:nvPr/>
         </p:nvSpPr>
@@ -8517,7 +8517,7 @@
       </p:sp>
       <p:sp>
         <p:nvSpPr>
-          <p:cNvPr id="437691435" name=""/>
+          <p:cNvPr id="1145016524" name=""/>
           <p:cNvSpPr/>
           <p:nvPr/>
         </p:nvSpPr>
@@ -8578,7 +8578,7 @@
       </p:sp>
       <p:sp>
         <p:nvSpPr>
-          <p:cNvPr id="2008153119" name=""/>
+          <p:cNvPr id="2066080247" name=""/>
           <p:cNvSpPr/>
           <p:nvPr/>
         </p:nvSpPr>
@@ -8645,7 +8645,7 @@
       </p:sp>
       <p:sp>
         <p:nvSpPr>
-          <p:cNvPr id="610022003" name=""/>
+          <p:cNvPr id="306695015" name=""/>
           <p:cNvSpPr txBox="1"/>
           <p:nvPr/>
         </p:nvSpPr>
@@ -8754,7 +8754,7 @@
       </p:grpSpPr>
       <p:sp>
         <p:nvSpPr>
-          <p:cNvPr id="1421958557" name=""/>
+          <p:cNvPr id="589157708" name=""/>
           <p:cNvSpPr/>
           <p:nvPr/>
         </p:nvSpPr>
@@ -8813,7 +8813,7 @@
       </p:sp>
       <p:sp>
         <p:nvSpPr>
-          <p:cNvPr id="537654111" name="Title 1"/>
+          <p:cNvPr id="1755835542" name="Title 1"/>
           <p:cNvSpPr>
             <a:spLocks noGrp="1"/>
           </p:cNvSpPr>
@@ -8857,7 +8857,7 @@
       </p:sp>
       <p:sp>
         <p:nvSpPr>
-          <p:cNvPr id="21558178" name="Marcador de contenido 2"/>
+          <p:cNvPr id="330062344" name="Marcador de contenido 2"/>
           <p:cNvSpPr>
             <a:spLocks noGrp="1"/>
           </p:cNvSpPr>
@@ -9057,7 +9057,7 @@
                 <a:ea typeface="Arial"/>
                 <a:cs typeface="Arial"/>
               </a:rPr>
-              <a:t> Una solución intuitiva, visual, transparente y rigurosamente auditada. </a:t>
+              <a:t>Una solución intuitiva, visual, transparente y rigurosamente auditada. </a:t>
             </a:r>
             <a:endParaRPr/>
           </a:p>
@@ -9065,7 +9065,7 @@
       </p:sp>
       <p:sp>
         <p:nvSpPr>
-          <p:cNvPr id="1359933921" name=""/>
+          <p:cNvPr id="259008267" name=""/>
           <p:cNvSpPr/>
           <p:nvPr/>
         </p:nvSpPr>
